--- a/LC UNIX/03 The Linux Filesystem.pptx
+++ b/LC UNIX/03 The Linux Filesystem.pptx
@@ -284,7 +284,7 @@
 <file path=ppt/revisionInfo.xml><?xml version="1.0" encoding="utf-8"?>
 <p1510:revInfo xmlns:a="http://schemas.openxmlformats.org/drawingml/2006/main" xmlns:r="http://schemas.openxmlformats.org/officeDocument/2006/relationships" xmlns:p1510="http://schemas.microsoft.com/office/powerpoint/2015/10/main">
   <p1510:revLst>
-    <p1510:client id="{E93AE150-B2AC-05D4-4ED7-A4AFDCB73321}" v="2" dt="2025-03-25T12:43:32.930"/>
+    <p1510:client id="{D6C622CF-F19B-A54D-9E2D-F2583FEFDF8C}" v="2" dt="2026-02-26T12:08:12.468"/>
   </p1510:revLst>
 </p1510:revInfo>
 </file>
@@ -292,189 +292,39 @@
 <file path=ppt/changesInfos/changesInfo1.xml><?xml version="1.0" encoding="utf-8"?>
 <pc:chgInfo xmlns:a="http://schemas.openxmlformats.org/drawingml/2006/main" xmlns:r="http://schemas.openxmlformats.org/officeDocument/2006/relationships" xmlns:ac="http://schemas.microsoft.com/office/drawing/2013/main/command" xmlns:pc="http://schemas.microsoft.com/office/powerpoint/2013/main/command">
   <pc:docChgLst>
-    <pc:chgData name="Baráth, Július" userId="aebde9b9-dccc-4475-a9ac-c05e78323d7a" providerId="ADAL" clId="{B400BBBD-C796-DD4E-9B10-06C02C92B5EA}"/>
-    <pc:docChg chg="modSld">
-      <pc:chgData name="Baráth, Július" userId="aebde9b9-dccc-4475-a9ac-c05e78323d7a" providerId="ADAL" clId="{B400BBBD-C796-DD4E-9B10-06C02C92B5EA}" dt="2025-03-25T06:20:06.735" v="0" actId="1036"/>
+    <pc:chgData name="Baráth, Július" userId="aebde9b9-dccc-4475-a9ac-c05e78323d7a" providerId="ADAL" clId="{4A0811C8-ED2F-505E-B787-C8270CED5046}"/>
+    <pc:docChg chg="custSel modSld">
+      <pc:chgData name="Baráth, Július" userId="aebde9b9-dccc-4475-a9ac-c05e78323d7a" providerId="ADAL" clId="{4A0811C8-ED2F-505E-B787-C8270CED5046}" dt="2026-02-26T12:09:00.649" v="83" actId="1076"/>
       <pc:docMkLst>
         <pc:docMk/>
       </pc:docMkLst>
       <pc:sldChg chg="modSp mod">
-        <pc:chgData name="Baráth, Július" userId="aebde9b9-dccc-4475-a9ac-c05e78323d7a" providerId="ADAL" clId="{B400BBBD-C796-DD4E-9B10-06C02C92B5EA}" dt="2025-03-25T06:20:06.735" v="0" actId="1036"/>
+        <pc:chgData name="Baráth, Július" userId="aebde9b9-dccc-4475-a9ac-c05e78323d7a" providerId="ADAL" clId="{4A0811C8-ED2F-505E-B787-C8270CED5046}" dt="2026-02-26T11:41:06.315" v="26" actId="12"/>
         <pc:sldMkLst>
           <pc:docMk/>
-          <pc:sldMk cId="2058040411" sldId="305"/>
+          <pc:sldMk cId="0" sldId="269"/>
         </pc:sldMkLst>
         <pc:spChg chg="mod">
-          <ac:chgData name="Baráth, Július" userId="aebde9b9-dccc-4475-a9ac-c05e78323d7a" providerId="ADAL" clId="{B400BBBD-C796-DD4E-9B10-06C02C92B5EA}" dt="2025-03-25T06:20:06.735" v="0" actId="1036"/>
+          <ac:chgData name="Baráth, Július" userId="aebde9b9-dccc-4475-a9ac-c05e78323d7a" providerId="ADAL" clId="{4A0811C8-ED2F-505E-B787-C8270CED5046}" dt="2026-02-26T11:41:06.315" v="26" actId="12"/>
           <ac:spMkLst>
             <pc:docMk/>
-            <pc:sldMk cId="2058040411" sldId="305"/>
-            <ac:spMk id="2" creationId="{0B2476AC-72B6-EA04-21BD-BB3663D96BDE}"/>
+            <pc:sldMk cId="0" sldId="269"/>
+            <ac:spMk id="110" creationId="{00000000-0000-0000-0000-000000000000}"/>
           </ac:spMkLst>
         </pc:spChg>
       </pc:sldChg>
-    </pc:docChg>
-  </pc:docChgLst>
-  <pc:docChgLst>
-    <pc:chgData name="Július Baráth" userId="e650c4ab-697e-4750-bd58-c1531aabce95" providerId="ADAL" clId="{FC84C00A-E5F6-407C-8A17-3474FF6CFDBE}"/>
-    <pc:docChg chg="modSld">
-      <pc:chgData name="Július Baráth" userId="e650c4ab-697e-4750-bd58-c1531aabce95" providerId="ADAL" clId="{FC84C00A-E5F6-407C-8A17-3474FF6CFDBE}" dt="2019-03-04T08:19:16.226" v="1" actId="1036"/>
-      <pc:docMkLst>
-        <pc:docMk/>
-      </pc:docMkLst>
-      <pc:sldChg chg="modSp">
-        <pc:chgData name="Július Baráth" userId="e650c4ab-697e-4750-bd58-c1531aabce95" providerId="ADAL" clId="{FC84C00A-E5F6-407C-8A17-3474FF6CFDBE}" dt="2019-03-04T08:19:16.226" v="1" actId="1036"/>
-        <pc:sldMkLst>
-          <pc:docMk/>
-          <pc:sldMk cId="0" sldId="275"/>
-        </pc:sldMkLst>
-      </pc:sldChg>
-    </pc:docChg>
-  </pc:docChgLst>
-  <pc:docChgLst>
-    <pc:chgData name="Baráth, Július" userId="aebde9b9-dccc-4475-a9ac-c05e78323d7a" providerId="ADAL" clId="{34138835-7BEC-4649-9C54-576CC74D11E4}"/>
-    <pc:docChg chg="undo custSel modSld">
-      <pc:chgData name="Baráth, Július" userId="aebde9b9-dccc-4475-a9ac-c05e78323d7a" providerId="ADAL" clId="{34138835-7BEC-4649-9C54-576CC74D11E4}" dt="2023-03-13T13:08:29.411" v="25" actId="20577"/>
-      <pc:docMkLst>
-        <pc:docMk/>
-      </pc:docMkLst>
       <pc:sldChg chg="addSp modSp mod">
-        <pc:chgData name="Baráth, Július" userId="aebde9b9-dccc-4475-a9ac-c05e78323d7a" providerId="ADAL" clId="{34138835-7BEC-4649-9C54-576CC74D11E4}" dt="2023-03-13T12:36:29.074" v="6" actId="1076"/>
-        <pc:sldMkLst>
-          <pc:docMk/>
-          <pc:sldMk cId="0" sldId="264"/>
-        </pc:sldMkLst>
-      </pc:sldChg>
-      <pc:sldChg chg="modSp mod">
-        <pc:chgData name="Baráth, Július" userId="aebde9b9-dccc-4475-a9ac-c05e78323d7a" providerId="ADAL" clId="{34138835-7BEC-4649-9C54-576CC74D11E4}" dt="2023-03-13T12:37:51.231" v="7" actId="113"/>
-        <pc:sldMkLst>
-          <pc:docMk/>
-          <pc:sldMk cId="0" sldId="271"/>
-        </pc:sldMkLst>
-      </pc:sldChg>
-      <pc:sldChg chg="modSp mod">
-        <pc:chgData name="Baráth, Július" userId="aebde9b9-dccc-4475-a9ac-c05e78323d7a" providerId="ADAL" clId="{34138835-7BEC-4649-9C54-576CC74D11E4}" dt="2023-03-13T13:08:29.411" v="25" actId="20577"/>
-        <pc:sldMkLst>
-          <pc:docMk/>
-          <pc:sldMk cId="0" sldId="272"/>
-        </pc:sldMkLst>
-      </pc:sldChg>
-    </pc:docChg>
-  </pc:docChgLst>
-  <pc:docChgLst>
-    <pc:chgData name="Baráth, Július" userId="aebde9b9-dccc-4475-a9ac-c05e78323d7a" providerId="ADAL" clId="{53BF6E3D-6B69-0543-942D-26BFF77D8F23}"/>
-    <pc:docChg chg="undo custSel addSld modSld">
-      <pc:chgData name="Baráth, Július" userId="aebde9b9-dccc-4475-a9ac-c05e78323d7a" providerId="ADAL" clId="{53BF6E3D-6B69-0543-942D-26BFF77D8F23}" dt="2024-06-25T13:58:32.515" v="160" actId="14100"/>
-      <pc:docMkLst>
-        <pc:docMk/>
-      </pc:docMkLst>
-      <pc:sldChg chg="addSp delSp modSp new mod modClrScheme chgLayout">
-        <pc:chgData name="Baráth, Július" userId="aebde9b9-dccc-4475-a9ac-c05e78323d7a" providerId="ADAL" clId="{53BF6E3D-6B69-0543-942D-26BFF77D8F23}" dt="2024-06-25T13:46:06.417" v="85" actId="14861"/>
+        <pc:chgData name="Baráth, Július" userId="aebde9b9-dccc-4475-a9ac-c05e78323d7a" providerId="ADAL" clId="{4A0811C8-ED2F-505E-B787-C8270CED5046}" dt="2026-02-26T12:09:00.649" v="83" actId="1076"/>
         <pc:sldMkLst>
           <pc:docMk/>
           <pc:sldMk cId="1867364700" sldId="303"/>
         </pc:sldMkLst>
-      </pc:sldChg>
-      <pc:sldChg chg="addSp delSp modSp new mod">
-        <pc:chgData name="Baráth, Július" userId="aebde9b9-dccc-4475-a9ac-c05e78323d7a" providerId="ADAL" clId="{53BF6E3D-6B69-0543-942D-26BFF77D8F23}" dt="2024-06-25T13:58:32.515" v="160" actId="14100"/>
-        <pc:sldMkLst>
-          <pc:docMk/>
-          <pc:sldMk cId="3097578835" sldId="304"/>
-        </pc:sldMkLst>
-      </pc:sldChg>
-      <pc:sldChg chg="addSp modSp new mod">
-        <pc:chgData name="Baráth, Július" userId="aebde9b9-dccc-4475-a9ac-c05e78323d7a" providerId="ADAL" clId="{53BF6E3D-6B69-0543-942D-26BFF77D8F23}" dt="2024-06-25T13:53:27.230" v="152" actId="1076"/>
-        <pc:sldMkLst>
-          <pc:docMk/>
-          <pc:sldMk cId="2058040411" sldId="305"/>
-        </pc:sldMkLst>
-      </pc:sldChg>
-    </pc:docChg>
-  </pc:docChgLst>
-  <pc:docChgLst>
-    <pc:chgData name="Július Baráth" userId="e650c4ab-697e-4750-bd58-c1531aabce95" providerId="ADAL" clId="{5DB115E3-C896-405A-81DE-2BAE6CA50919}"/>
-    <pc:docChg chg="custSel modSld">
-      <pc:chgData name="Július Baráth" userId="e650c4ab-697e-4750-bd58-c1531aabce95" providerId="ADAL" clId="{5DB115E3-C896-405A-81DE-2BAE6CA50919}" dt="2021-03-12T07:49:42.199" v="181" actId="6549"/>
-      <pc:docMkLst>
-        <pc:docMk/>
-      </pc:docMkLst>
-      <pc:sldChg chg="modSp mod">
-        <pc:chgData name="Július Baráth" userId="e650c4ab-697e-4750-bd58-c1531aabce95" providerId="ADAL" clId="{5DB115E3-C896-405A-81DE-2BAE6CA50919}" dt="2021-03-11T15:02:13.130" v="29" actId="20577"/>
-        <pc:sldMkLst>
-          <pc:docMk/>
-          <pc:sldMk cId="0" sldId="267"/>
-        </pc:sldMkLst>
-      </pc:sldChg>
-      <pc:sldChg chg="modSp mod">
-        <pc:chgData name="Július Baráth" userId="e650c4ab-697e-4750-bd58-c1531aabce95" providerId="ADAL" clId="{5DB115E3-C896-405A-81DE-2BAE6CA50919}" dt="2021-03-12T07:22:17.433" v="154" actId="1076"/>
-        <pc:sldMkLst>
-          <pc:docMk/>
-          <pc:sldMk cId="0" sldId="268"/>
-        </pc:sldMkLst>
-      </pc:sldChg>
-      <pc:sldChg chg="modSp mod">
-        <pc:chgData name="Július Baráth" userId="e650c4ab-697e-4750-bd58-c1531aabce95" providerId="ADAL" clId="{5DB115E3-C896-405A-81DE-2BAE6CA50919}" dt="2021-03-11T15:08:19.417" v="44" actId="20577"/>
-        <pc:sldMkLst>
-          <pc:docMk/>
-          <pc:sldMk cId="0" sldId="272"/>
-        </pc:sldMkLst>
-      </pc:sldChg>
-      <pc:sldChg chg="modSp mod">
-        <pc:chgData name="Július Baráth" userId="e650c4ab-697e-4750-bd58-c1531aabce95" providerId="ADAL" clId="{5DB115E3-C896-405A-81DE-2BAE6CA50919}" dt="2021-03-11T16:05:05.723" v="143" actId="20577"/>
-        <pc:sldMkLst>
-          <pc:docMk/>
-          <pc:sldMk cId="0" sldId="274"/>
-        </pc:sldMkLst>
-      </pc:sldChg>
-      <pc:sldChg chg="modSp mod">
-        <pc:chgData name="Július Baráth" userId="e650c4ab-697e-4750-bd58-c1531aabce95" providerId="ADAL" clId="{5DB115E3-C896-405A-81DE-2BAE6CA50919}" dt="2021-03-11T16:05:54.170" v="144" actId="1076"/>
-        <pc:sldMkLst>
-          <pc:docMk/>
-          <pc:sldMk cId="0" sldId="275"/>
-        </pc:sldMkLst>
-      </pc:sldChg>
-      <pc:sldChg chg="modSp mod">
-        <pc:chgData name="Július Baráth" userId="e650c4ab-697e-4750-bd58-c1531aabce95" providerId="ADAL" clId="{5DB115E3-C896-405A-81DE-2BAE6CA50919}" dt="2021-03-12T07:48:30.087" v="173" actId="20577"/>
-        <pc:sldMkLst>
-          <pc:docMk/>
-          <pc:sldMk cId="0" sldId="280"/>
-        </pc:sldMkLst>
-      </pc:sldChg>
-      <pc:sldChg chg="modSp mod">
-        <pc:chgData name="Július Baráth" userId="e650c4ab-697e-4750-bd58-c1531aabce95" providerId="ADAL" clId="{5DB115E3-C896-405A-81DE-2BAE6CA50919}" dt="2021-03-12T07:49:42.199" v="181" actId="6549"/>
-        <pc:sldMkLst>
-          <pc:docMk/>
-          <pc:sldMk cId="0" sldId="284"/>
-        </pc:sldMkLst>
-      </pc:sldChg>
-      <pc:sldChg chg="addSp modSp mod">
-        <pc:chgData name="Július Baráth" userId="e650c4ab-697e-4750-bd58-c1531aabce95" providerId="ADAL" clId="{5DB115E3-C896-405A-81DE-2BAE6CA50919}" dt="2021-03-11T16:25:51.850" v="153" actId="14100"/>
-        <pc:sldMkLst>
-          <pc:docMk/>
-          <pc:sldMk cId="0" sldId="299"/>
-        </pc:sldMkLst>
-      </pc:sldChg>
-    </pc:docChg>
-  </pc:docChgLst>
-  <pc:docChgLst>
-    <pc:chgData name="Baráth, Július" userId="S::julius.barath@aos.sk::aebde9b9-dccc-4475-a9ac-c05e78323d7a" providerId="AD" clId="Web-{E93AE150-B2AC-05D4-4ED7-A4AFDCB73321}"/>
-    <pc:docChg chg="modSld">
-      <pc:chgData name="Baráth, Július" userId="S::julius.barath@aos.sk::aebde9b9-dccc-4475-a9ac-c05e78323d7a" providerId="AD" clId="Web-{E93AE150-B2AC-05D4-4ED7-A4AFDCB73321}" dt="2025-03-25T12:43:32.930" v="1" actId="20577"/>
-      <pc:docMkLst>
-        <pc:docMk/>
-      </pc:docMkLst>
-      <pc:sldChg chg="modSp">
-        <pc:chgData name="Baráth, Július" userId="S::julius.barath@aos.sk::aebde9b9-dccc-4475-a9ac-c05e78323d7a" providerId="AD" clId="Web-{E93AE150-B2AC-05D4-4ED7-A4AFDCB73321}" dt="2025-03-25T12:43:32.930" v="1" actId="20577"/>
-        <pc:sldMkLst>
-          <pc:docMk/>
-          <pc:sldMk cId="1867364700" sldId="303"/>
-        </pc:sldMkLst>
-        <pc:spChg chg="mod">
-          <ac:chgData name="Baráth, Július" userId="S::julius.barath@aos.sk::aebde9b9-dccc-4475-a9ac-c05e78323d7a" providerId="AD" clId="Web-{E93AE150-B2AC-05D4-4ED7-A4AFDCB73321}" dt="2025-03-25T12:43:32.930" v="1" actId="20577"/>
+        <pc:spChg chg="add mod">
+          <ac:chgData name="Baráth, Július" userId="aebde9b9-dccc-4475-a9ac-c05e78323d7a" providerId="ADAL" clId="{4A0811C8-ED2F-505E-B787-C8270CED5046}" dt="2026-02-26T12:09:00.649" v="83" actId="1076"/>
           <ac:spMkLst>
             <pc:docMk/>
             <pc:sldMk cId="1867364700" sldId="303"/>
-            <ac:spMk id="5" creationId="{6555F588-E22C-2C19-00A9-F532675741B1}"/>
+            <ac:spMk id="2" creationId="{BAD9AA20-FACB-9CD6-35B3-42350701E86D}"/>
           </ac:spMkLst>
         </pc:spChg>
       </pc:sldChg>
@@ -9284,7 +9134,7 @@
               <a:buChar char="•"/>
             </a:pPr>
             <a:r>
-              <a:rPr lang="en-US" sz="3333" b="0">
+              <a:rPr lang="en-US" sz="3333" b="0" dirty="0">
                 <a:solidFill>
                   <a:srgbClr val="666666"/>
                 </a:solidFill>
@@ -9296,16 +9146,16 @@
               <a:t>total</a:t>
             </a:r>
             <a:r>
-              <a:rPr lang="en-US" sz="3333" b="0">
-                <a:solidFill>
-                  <a:srgbClr val="666666"/>
-                </a:solidFill>
-                <a:latin typeface="Arial"/>
-                <a:ea typeface="Arial"/>
-                <a:cs typeface="Arial"/>
-                <a:sym typeface="Arial"/>
-              </a:rPr>
-              <a:t> – total amount of disk space used by the files </a:t>
+              <a:rPr lang="en-US" sz="3333" b="0" dirty="0">
+                <a:solidFill>
+                  <a:srgbClr val="666666"/>
+                </a:solidFill>
+                <a:latin typeface="Arial"/>
+                <a:ea typeface="Arial"/>
+                <a:cs typeface="Arial"/>
+                <a:sym typeface="Arial"/>
+              </a:rPr>
+              <a:t> – total amount of disk space used by the files (block size stat –f .)</a:t>
             </a:r>
           </a:p>
           <a:p>
@@ -9327,7 +9177,7 @@
               <a:buChar char="•"/>
             </a:pPr>
             <a:r>
-              <a:rPr lang="en-US" sz="3333" b="0">
+              <a:rPr lang="en-US" sz="3333" b="0" dirty="0">
                 <a:solidFill>
                   <a:srgbClr val="666666"/>
                 </a:solidFill>
@@ -9339,7 +9189,7 @@
               <a:t>col 1</a:t>
             </a:r>
             <a:r>
-              <a:rPr lang="en-US" sz="3333" b="0">
+              <a:rPr lang="en-US" sz="3333" b="0" dirty="0">
                 <a:solidFill>
                   <a:srgbClr val="666666"/>
                 </a:solidFill>
@@ -9352,7 +9202,7 @@
             </a:r>
           </a:p>
           <a:p>
-            <a:pPr marL="762000" marR="0" lvl="1" indent="-262466" algn="l" rtl="0">
+            <a:pPr marL="956734" marR="0" lvl="1" indent="-457200" algn="l" rtl="0">
               <a:lnSpc>
                 <a:spcPct val="100000"/>
               </a:lnSpc>
@@ -9366,11 +9216,11 @@
                 <a:srgbClr val="666666"/>
               </a:buClr>
               <a:buSzPct val="101010"/>
-              <a:buFont typeface="Courier New"/>
-              <a:buChar char="o"/>
-            </a:pPr>
-            <a:r>
-              <a:rPr lang="en-US" sz="3333" b="0">
+              <a:buFont typeface="Arial" panose="020B0604020202020204" pitchFamily="34" charset="0"/>
+              <a:buChar char="•"/>
+            </a:pPr>
+            <a:r>
+              <a:rPr lang="en-US" sz="3333" b="0" dirty="0">
                 <a:solidFill>
                   <a:srgbClr val="666666"/>
                 </a:solidFill>
@@ -9382,7 +9232,7 @@
               <a:t>-</a:t>
             </a:r>
             <a:r>
-              <a:rPr lang="en-US" sz="3333" b="0">
+              <a:rPr lang="en-US" sz="3333" b="0" dirty="0">
                 <a:solidFill>
                   <a:srgbClr val="666666"/>
                 </a:solidFill>
@@ -9395,7 +9245,7 @@
             </a:r>
           </a:p>
           <a:p>
-            <a:pPr marL="762000" marR="0" lvl="1" indent="-262466" algn="l" rtl="0">
+            <a:pPr marL="956734" marR="0" lvl="1" indent="-457200" algn="l" rtl="0">
               <a:lnSpc>
                 <a:spcPct val="100000"/>
               </a:lnSpc>
@@ -9409,11 +9259,11 @@
                 <a:srgbClr val="666666"/>
               </a:buClr>
               <a:buSzPct val="101010"/>
-              <a:buFont typeface="Courier New"/>
-              <a:buChar char="o"/>
-            </a:pPr>
-            <a:r>
-              <a:rPr lang="en-US" sz="3333" b="0">
+              <a:buFont typeface="Arial" panose="020B0604020202020204" pitchFamily="34" charset="0"/>
+              <a:buChar char="•"/>
+            </a:pPr>
+            <a:r>
+              <a:rPr lang="en-US" sz="3333" b="0" dirty="0">
                 <a:solidFill>
                   <a:srgbClr val="666666"/>
                 </a:solidFill>
@@ -9425,7 +9275,7 @@
               <a:t>d</a:t>
             </a:r>
             <a:r>
-              <a:rPr lang="en-US" sz="3333" b="0">
+              <a:rPr lang="en-US" sz="3333" b="0" dirty="0">
                 <a:solidFill>
                   <a:srgbClr val="666666"/>
                 </a:solidFill>
@@ -9438,7 +9288,7 @@
             </a:r>
           </a:p>
           <a:p>
-            <a:pPr marL="762000" marR="0" lvl="1" indent="-262466" algn="l" rtl="0">
+            <a:pPr marL="956734" marR="0" lvl="1" indent="-457200" algn="l" rtl="0">
               <a:lnSpc>
                 <a:spcPct val="100000"/>
               </a:lnSpc>
@@ -9452,11 +9302,11 @@
                 <a:srgbClr val="666666"/>
               </a:buClr>
               <a:buSzPct val="101010"/>
-              <a:buFont typeface="Courier New"/>
-              <a:buChar char="o"/>
-            </a:pPr>
-            <a:r>
-              <a:rPr lang="en-US" sz="3333" b="0">
+              <a:buFont typeface="Arial" panose="020B0604020202020204" pitchFamily="34" charset="0"/>
+              <a:buChar char="•"/>
+            </a:pPr>
+            <a:r>
+              <a:rPr lang="en-US" sz="3333" b="0" dirty="0">
                 <a:solidFill>
                   <a:srgbClr val="666666"/>
                 </a:solidFill>
@@ -9468,7 +9318,7 @@
               <a:t>l</a:t>
             </a:r>
             <a:r>
-              <a:rPr lang="en-US" sz="3333" b="0">
+              <a:rPr lang="en-US" sz="3333" b="0" dirty="0">
                 <a:solidFill>
                   <a:srgbClr val="666666"/>
                 </a:solidFill>
@@ -9481,7 +9331,7 @@
             </a:r>
           </a:p>
           <a:p>
-            <a:pPr marL="762000" marR="0" lvl="1" indent="-262466" algn="l" rtl="0">
+            <a:pPr marL="956734" marR="0" lvl="1" indent="-457200" algn="l" rtl="0">
               <a:lnSpc>
                 <a:spcPct val="100000"/>
               </a:lnSpc>
@@ -9495,11 +9345,11 @@
                 <a:srgbClr val="666666"/>
               </a:buClr>
               <a:buSzPct val="101010"/>
-              <a:buFont typeface="Courier New"/>
-              <a:buChar char="o"/>
-            </a:pPr>
-            <a:r>
-              <a:rPr lang="en-US" sz="3333" b="0">
+              <a:buFont typeface="Arial" panose="020B0604020202020204" pitchFamily="34" charset="0"/>
+              <a:buChar char="•"/>
+            </a:pPr>
+            <a:r>
+              <a:rPr lang="en-US" sz="3333" b="0" dirty="0">
                 <a:solidFill>
                   <a:srgbClr val="666666"/>
                 </a:solidFill>
@@ -9511,7 +9361,7 @@
               <a:t>b</a:t>
             </a:r>
             <a:r>
-              <a:rPr lang="en-US" sz="3333" b="0">
+              <a:rPr lang="en-US" sz="3333" b="0" dirty="0">
                 <a:solidFill>
                   <a:srgbClr val="666666"/>
                 </a:solidFill>
@@ -9524,7 +9374,7 @@
             </a:r>
           </a:p>
           <a:p>
-            <a:pPr marL="762000" marR="0" lvl="1" indent="-262466" algn="l" rtl="0">
+            <a:pPr marL="956734" marR="0" lvl="1" indent="-457200" algn="l" rtl="0">
               <a:lnSpc>
                 <a:spcPct val="100000"/>
               </a:lnSpc>
@@ -9538,11 +9388,11 @@
                 <a:srgbClr val="666666"/>
               </a:buClr>
               <a:buSzPct val="101010"/>
-              <a:buFont typeface="Courier New"/>
-              <a:buChar char="o"/>
-            </a:pPr>
-            <a:r>
-              <a:rPr lang="en-US" sz="3333" b="0">
+              <a:buFont typeface="Arial" panose="020B0604020202020204" pitchFamily="34" charset="0"/>
+              <a:buChar char="•"/>
+            </a:pPr>
+            <a:r>
+              <a:rPr lang="en-US" sz="3333" b="0" dirty="0">
                 <a:solidFill>
                   <a:srgbClr val="666666"/>
                 </a:solidFill>
@@ -9554,7 +9404,7 @@
               <a:t>c</a:t>
             </a:r>
             <a:r>
-              <a:rPr lang="en-US" sz="3333" b="0">
+              <a:rPr lang="en-US" sz="3333" b="0" dirty="0">
                 <a:solidFill>
                   <a:srgbClr val="666666"/>
                 </a:solidFill>
@@ -28240,7 +28090,7 @@
               <a:buChar char="-"/>
             </a:pPr>
             <a:r>
-              <a:rPr lang="sk-SK" sz="2650" b="1" err="1">
+              <a:rPr lang="sk-SK" sz="2650" b="1" dirty="0" err="1">
                 <a:solidFill>
                   <a:srgbClr val="000000"/>
                 </a:solidFill>
@@ -28260,7 +28110,7 @@
               <a:t> </a:t>
             </a:r>
             <a:r>
-              <a:rPr lang="sk-SK" sz="2650" b="1" err="1">
+              <a:rPr lang="sk-SK" sz="2650" b="1" dirty="0" err="1">
                 <a:solidFill>
                   <a:srgbClr val="000000"/>
                 </a:solidFill>
@@ -28280,7 +28130,7 @@
               <a:t>-get </a:t>
             </a:r>
             <a:r>
-              <a:rPr lang="sk-SK" sz="2650" b="1" err="1">
+              <a:rPr lang="sk-SK" sz="2650" b="1" dirty="0" err="1">
                 <a:solidFill>
                   <a:srgbClr val="000000"/>
                 </a:solidFill>
@@ -28300,7 +28150,7 @@
               <a:t> </a:t>
             </a:r>
             <a:r>
-              <a:rPr lang="sk-SK" sz="2650" b="1" err="1">
+              <a:rPr lang="sk-SK" sz="2650" b="1" dirty="0" err="1">
                 <a:solidFill>
                   <a:srgbClr val="000000"/>
                 </a:solidFill>
@@ -28309,7 +28159,7 @@
               </a:rPr>
               <a:t>acl</a:t>
             </a:r>
-            <a:endParaRPr lang="sk-SK" sz="2650" b="1">
+            <a:endParaRPr lang="sk-SK" sz="2650" b="1" dirty="0">
               <a:solidFill>
                 <a:srgbClr val="000000"/>
               </a:solidFill>
@@ -28373,6 +28223,53 @@
           </a:effectLst>
         </p:spPr>
       </p:pic>
+      <p:sp>
+        <p:nvSpPr>
+          <p:cNvPr id="2" name="BlokTextu 1">
+            <a:extLst>
+              <a:ext uri="{FF2B5EF4-FFF2-40B4-BE49-F238E27FC236}">
+                <a16:creationId xmlns:a16="http://schemas.microsoft.com/office/drawing/2014/main" id="{BAD9AA20-FACB-9CD6-35B3-42350701E86D}"/>
+              </a:ext>
+            </a:extLst>
+          </p:cNvPr>
+          <p:cNvSpPr txBox="1"/>
+          <p:nvPr/>
+        </p:nvSpPr>
+        <p:spPr>
+          <a:xfrm>
+            <a:off x="685800" y="6232912"/>
+            <a:ext cx="8020144" cy="461665"/>
+          </a:xfrm>
+          <a:prstGeom prst="rect">
+            <a:avLst/>
+          </a:prstGeom>
+          <a:noFill/>
+        </p:spPr>
+        <p:txBody>
+          <a:bodyPr wrap="none" rtlCol="0">
+            <a:spAutoFit/>
+          </a:bodyPr>
+          <a:lstStyle/>
+          <a:p>
+            <a:r>
+              <a:rPr lang="sk-SK" sz="2400" dirty="0" err="1"/>
+              <a:t>dpkg</a:t>
+            </a:r>
+            <a:r>
+              <a:rPr lang="sk-SK" sz="2400" dirty="0"/>
+              <a:t> -s </a:t>
+            </a:r>
+            <a:r>
+              <a:rPr lang="sk-SK" sz="2400" dirty="0" err="1"/>
+              <a:t>acl</a:t>
+            </a:r>
+            <a:r>
+              <a:rPr lang="sk-SK" sz="2400" dirty="0"/>
+              <a:t>		zistí, či je balík ACL už nainštalovaný</a:t>
+            </a:r>
+          </a:p>
+        </p:txBody>
+      </p:sp>
     </p:spTree>
     <p:extLst>
       <p:ext uri="{BB962C8B-B14F-4D97-AF65-F5344CB8AC3E}">
